--- a/outputs/algorithm-design-v4/slides/Legal_AI_Final_Methods.pptx
+++ b/outputs/algorithm-design-v4/slides/Legal_AI_Final_Methods.pptx
@@ -449,7 +449,7 @@
           <a:lstStyle xmlns:a="http://schemas.openxmlformats.org/drawingml/2006/main"/>
           <a:p xmlns:a="http://schemas.openxmlformats.org/drawingml/2006/main">
             <a:r>
-              <a:t>这次方案保留项目原本从证据到事实、模式、因素、要件和结论的流程，重点解决三个计算问题。A给事实明确含义，规定它能用于什么计算；B生成可复用的关系，并执行检查和修正；C从法源取得规则和桥接，重建论证。请指着下方直连线：C直接读取A，B不是法律事实的唯一入口。原PDF已经有embedding检索、LLM关系判断、保守聚类和来源保存。我们改进的是定义修订、对象关系搜索和跨模块的使用条件。当前语料是判决文书，首版做回顾性发现，不能宣称判前预测。整份deck中的案例和法律规则都是构造例子，当前没有真实案件效果结果。</a:t>
+              <a:t>The design retains evidence, facts, patterns, factors, elements and conclusions. A gives facts explicit meanings and computational uses; B proposes reusable relations and executes/checks/repairs them; C acquires sourced rules/bridges and reconstructs arguments. Point to A-to-C: B is not the only legal-fact entry. The original PDF already has embedding retrieval, LLM relation judgments, conservative clustering and provenance. Additions concern definition revision, object-relation search and cross-module use conditions. Judgment data support retrospective discovery, not predecision prediction. All examples/rules in this deck are fictional and no real-case effectiveness result is established.</a:t>
             </a:r>
           </a:p>
           <a:p xmlns:a="http://schemas.openxmlformats.org/drawingml/2006/main">
@@ -529,7 +529,7 @@
           <a:lstStyle xmlns:a="http://schemas.openxmlformats.org/drawingml/2006/main"/>
           <a:p xmlns:a="http://schemas.openxmlformats.org/drawingml/2006/main">
             <a:r>
-              <a:t>A的输入是带原文的断言。先开放抽取，再起草有参数、排除项、正例和边界反例的定义卡。新断言用别名、BM25和向量检索找候选卡，逐槽检查来源，唯一明确的最具体定义通过才接受机器映射。重要限定不能被相似度抵消。本页三项可以共享付款这个类型，但债务、部分或足额、法院认定或当事人主张仍各自保存。严格等价要求在声明的抽象政策下完整规范签名一致；family只组织相关或上下位类型，不产生替换许可。通知寄出和收到可作为NOTICE_EVENT family下的不同类型。定义错误时依据原文修别名、补参数或拆分定义，回放已审阅正反例，无回归才发布新版本。四种状态分开：来源陈述状态、字段可用性、机器接受状态、人工审阅状态。COURT_FOUND仍可能只是未经人工核验的机器抽取。近期ClassMATe启发定义与实例共同修订，GraphRefine启发区分纠错、含义不变的改写与排除，不能直接照搬其监督训练成绩。</a:t>
+              <a:t>Begin with sourced assertions, open extraction and cards containing parameters, exclusions, positives and hard boundaries. Retrieve by aliases, BM25 and vectors, check each slot against sources, and accept a uniquely supported most-specific machine mapping. Similarity cannot offset important qualifications. Payment examples share a type while retaining debt, partial/full settlement and court-found/alleged status. Strict equivalence requires full signatures under a declared abstraction policy; families organize related/parent types without substitution. Dispatch and receipt may be separate NOTICE_EVENT types. Repair aliases/parameters or split definitions from sources and replay reviewed positives/negatives without regression before release. Keep source status, field availability, machine acceptance and human review separate: COURT_FOUND may still be unreviewed extraction. ClassMATe motivates definition/instance revision, GraphRefine distinguishes correction, meaning-preserving rewrite and exclusion; their supervised scores do not transfer automatically.</a:t>
             </a:r>
           </a:p>
           <a:p xmlns:a="http://schemas.openxmlformats.org/drawingml/2006/main">
@@ -609,7 +609,7 @@
           <a:lstStyle xmlns:a="http://schemas.openxmlformats.org/drawingml/2006/main"/>
           <a:p xmlns:a="http://schemas.openxmlformats.org/drawingml/2006/main">
             <a:r>
-              <a:t>例子中初次抽取识别了付款和足额，但没有解析“只用于D2”。只把这句话留在metadata里不够，因为后续程序可能继续拿full=true证明D1清偿。我们给残余登记所属断言和影响位置，例如债务归属、足额对象。每个查询声明必需字段，编译器计算依赖闭包，存在相交的未解决残余就阻断这次用途。左边p1可能通过经批准的投影支持“文书记载付款”，但不能支持“D1已付清”。若连残余作用域都不清楚，默认阻断所属断言或可能受影响的原断言组，不能让LLM一句不相关解除。原文审查后补出D2，该用途成为明确不匹配。另一条独立完整的D1付款仍可用，不封锁整案。依赖分析也可能错，因此随机审计必须从原文段落抽样，包括漏抽、排除和高置信记录。当前预算初值1/4随机、3/4冲突边界，比例不是理论最优。这个用途级阻断和来源修复是最值得先验证的贡献假设。</a:t>
+              <a:t>Initial extraction finds payment and full amount but misses only for D2. Metadata preservation alone lets downstream full=true incorrectly discharge D1. Attach the residual to its assertion and affected debt/settlement-target fields. Queries declare required reads and the compiler closes dependencies; intersecting unresolved residuals block that use. An approved projection may report payment occurrence without proving D1 settlement. Unknown residual scope blocks its assertion or affected original group; an unsupported LLM irrelevance claim cannot unblock it. Source review resolving D2 produces a definite mismatch. Independent complete D1 payment remains usable, avoiding whole-case blockage. Dependency analysis can err, so random audits sample source paragraphs including omissions, exclusions and high-confidence records. Initial review allocation is one quarter random and three quarters conflict/boundary, not a theoretical optimum. Purpose-level blocking/source repair is the primary hypothesis.</a:t>
             </a:r>
           </a:p>
           <a:p xmlns:a="http://schemas.openxmlformats.org/drawingml/2006/main">
@@ -689,7 +689,7 @@
           <a:lstStyle xmlns:a="http://schemas.openxmlformats.org/drawingml/2006/main"/>
           <a:p xmlns:a="http://schemas.openxmlformats.org/drawingml/2006/main">
             <a:r>
-              <a:t>B默认从实际存在的2到4原子连通片段出发，不从所有可能谓词任意组合。连通要求真实主体、合同或事件关系，case_id、相同金额或同一类型不能充当连接。两份兼容片段反统一为有类型变量，保留共同关系；LLM补充有来源的描述概念，并明确缺观察字段还是缺算子。候选必须有固定意图。本例意图是同一债务收到通知后足额清偿，错误查询却把D1通知和D2付款连起来。执行器保存各节点绑定，定位为债务变量未统一，再做有依据的局部修正。还要要求收到而非寄出、足额针对该债务、允许的陈述状态，日期差只能读对应事件日期。不同意图各自维护beam，不让更宽的概念靠高覆盖获胜。首版展开最多6原子、6对象变量、4标量变量、2层，每意图3轮、每父8补丁、beam12；10%执行预算补查短二原子查询，均是运行初值。先过来源、范围、语义测试，再比较简洁和执行成本。字段未知、绑定失败、无记录见证和执行超时分开。没有记录不等于现实为假。近期RHDA和ADVENT启发执行反馈与语言取得，但我们没有它们的相同监督条件。</a:t>
+              <a:t>Start with real connected 2–4-atom fragments, not arbitrary predicate combinations. Connections require actual parties/contracts/events; case_id, equal amounts or types do not suffice. Typed anti-unification preserves common relations. LLMs add sourced descriptions and distinguish missing observations from missing operators. Fix each candidate's intent. Here same-debt settlement after receipt is violated by joining D1 notice and D2 payment. Node binding traces diagnose ununified debt variables for evidenced local repair. Also require receipt rather than dispatch, full settlement of that debt and eligible status; dates must belong to the corresponding events. Separate intent beams prevent broad concepts winning by coverage. Initial limits: six expanded atoms, six object variables, four scalar variables, two levels, three rounds/intent, eight patches/parent, beam twelve; reserve 10% execution budget for short two-atom supplements. After source/scope/semantic checks compare simplicity and cost. Separate unknown fields, failed bindings, no recorded witness and timeout. Silence is not real-world falsity. RHDA/ADVENT motivate execution feedback/language acquisition, but their supervision differs.</a:t>
             </a:r>
           </a:p>
           <a:p xmlns:a="http://schemas.openxmlformats.org/drawingml/2006/main">
@@ -769,7 +769,7 @@
           <a:lstStyle xmlns:a="http://schemas.openxmlformats.org/drawingml/2006/main"/>
           <a:p xmlns:a="http://schemas.openxmlformats.org/drawingml/2006/main">
             <a:r>
-              <a:t>G保存可执行关系及其审阅等级，S是从G里选出便于概览的紧凑描述。C可直接用A或G，不因关系没进入S就删掉罕见例外。最小描述长度的直觉是定义付一次成本，多次调用保留各自真实绑定，剩余事实仍单独保存。真实编码要计入完整定义、所有恢复所需变量、source ID、状态和残余，不能只写个P名字假装压缩。固定同一个A版本数据D，公共头部也统一计费。首版压缩覆盖中每条事实记录恢复一次，不同调用可以共享合同或主体ID；G中的见证仍可以重叠。这个取舍比上一轮允许任意重叠token更简单，代价是可能损失部分压缩收益。内层从literal开始选净节省最多的合法调用，外层尝试添加或删除一个模式并重算总位数，至少改善1bit才接受，预算耗尽停止；不要求第一次调用独自偿还全部定义。不用MILP，不承诺全局最优。每次更新都检查解码后逐条恢复D。KG-MDL支持共享节点而不重叠边的类似思路；Snor说明重叠需要专门覆盖机制，不是简单删掉不相交条件。本页没有实测码长。</a:t>
+              <a:t>G retains executable relations and review grades; S is a compact overview selected from G. C can use A/G directly, so rare exceptions survive exclusion from S. MDL charges a definition once and each call's real bindings, retaining residual facts. Encode full definitions, all reconstruction variables, source IDs, statuses and residuals; a short P name cannot manufacture savings. Fix D to one A version and charge a shared header consistently. Each fact record is reconstructed once in the initial cover, though calls may share contracts/parties and G witnesses may overlap. This simpler choice may lose compression versus overlapping tokens. Inner covering starts from literals and chooses greatest legal savings; outer add/delete moves recompute total length and require at least one bit improvement. The first call need not repay the entire definition. No MILP or global optimality claim. Every accepted change round-trips D exactly. KG-MDL offers related shared-node/nonoverlapping-edge coding; Snor requires a special overlap mechanism, not merely deleting disjointness. No measured lengths are shown.</a:t>
             </a:r>
           </a:p>
           <a:p xmlns:a="http://schemas.openxmlformats.org/drawingml/2006/main">
@@ -849,7 +849,7 @@
           <a:lstStyle xmlns:a="http://schemas.openxmlformats.org/drawingml/2006/main"/>
           <a:p xmlns:a="http://schemas.openxmlformats.org/drawingml/2006/main">
             <a:r>
-              <a:t>C输入不是可靠现成规则，而是法源包：正文、定义、例外、引用、法域、有效时间、程序范围和法院怎样使用来源。沿已识别引用展开，缺失条文要标出，不能假称法律来源已穷尽。使用共享词表联合起草RuleCard和BridgeCard，每个组成回指来源。桥接回答描述事实还要满足什么才能算法律条件，例如实际收到还要检查指定收件人和合同债务标识，才可能在这条虚构规则下算有效通知。依法视为收到另有法律规则，不能改写为实际收到。候选经类型绑定检查，以及原文独立产生的必要条件、例外和范围测试；有失败就局部修复。不能自己编规则再自己生成答案自证正确。最多3解释、每解释3轮，未解分歧保留。规范含义、桥接、例外政策和优先关系由法律审阅批准后进入正式规则包。仅支持或削弱的因素存为ReasonFor/Against，不自动成为足以胜诉的条件。DDL形式化研究影响联合取得和来源测试；LRI/SILVER的归纳机制只用于候选，不能把多数支持当法源。</a:t>
+              <a:t>C starts with legal-source packages, not reliable ready-made rules: text, definitions, exceptions, references, jurisdiction, validity period, procedure and judicial use. Follow identified references and mark missing provisions without claiming exhaustive law retrieval. Jointly draft RuleCard/BridgeCard using shared vocabulary and source every component. Bridges establish what actual receipt additionally needs, such as designated recipient and debt identification under the fictional rule. Deemed receipt is a separate legal rule, never an actual-receipt fact. Type/binding checks and independently source-derived premise/exception/scope tests guide local repair. Self-authored rules and answers cannot self-certify. Allow three interpretations with three rounds each; preserve unresolved disputes. Legal review approves normative meanings, bridges, exception policies and priorities for formal use. Mere factors remain ReasonFor/Against rather than sufficient victory conditions. DDL motivates joint acquisition/source tests; LRI/SILVER induction proposes candidates, not legal authority from majority support.</a:t>
             </a:r>
           </a:p>
           <a:p xmlns:a="http://schemas.openxmlformats.org/drawingml/2006/main">
@@ -929,7 +929,7 @@
           <a:lstStyle xmlns:a="http://schemas.openxmlformats.org/drawingml/2006/main"/>
           <a:p xmlns:a="http://schemas.openxmlformats.org/drawingml/2006/main">
             <a:r>
-              <a:t>沿用甲案K1/D1。注意这里使用的是独立完整的p5付款，不是前面有D2限定的p1。n1在5月4日实际收到，p5在13日付清，按例中规定的日历差是9日。寄出日1日会算成12日，不能替代收到日。假设收件人和债务标识等桥接条件也已齐备，但款项是否依法撤销未记载。若这条经审阅规则规定有合格撤销依据才攻击普通规则，则可形成默认支持，展示时同时写明撤销未知；不能声称已证明没有撤销。如果另一条规则要求明确证明未撤销，同样资料缺前提。这是不同规则政策导致的不同结果。C先构造完整有限论证和攻击，再求grounded标记：无有效反驳者的进入IN，被IN反驳的OUT，其余可能未决。不能先要求例外IN再画攻击，不能在不完整图上认证结果。首版用受限ASPIC+，仅处理明确的规则优先和唯一最后可推翻规则比较，复杂规范保留未支持说明。K2/D3的收到日期未知则不能走这条期限路线；部分付款和当事人主张也不代替完整法院认定。输出仅针对特定解除理由，不是整个案件胜诉预测。</a:t>
+              <a:t>Use Alpha K1/D1 with independent complete p5, not D2-qualified p1. n1 arrives May 4 and p5 settles May 13, giving nine calendar days. Dispatch on May 1 would give twelve and cannot replace receipt. Assume recipient/debt bridges hold but legal revocation is unspecified. If qualified revocation evidence attacks a default rule, default support can stand while revocation remains unknown; absence is not proven. A policy requiring explicit nonrevocation instead leaves a missing premise. C first constructs the complete finite arguments/attacks, then grounded labels: undefeated arguments IN, those defeated by IN OUT, others possibly unresolved. Do not require exceptions already IN before drawing attacks or certify incomplete graphs. Restricted ASPIC+ handles explicit priorities and unique last-defeasible-rule comparison; unsupported complex norms remain documented. K2/D3 lacks receipt timing; partial payments/allegations cannot substitute for complete court findings. Output concerns a particular termination ground, not whole-case victory.</a:t>
             </a:r>
           </a:p>
           <a:p xmlns:a="http://schemas.openxmlformats.org/drawingml/2006/main">
@@ -1009,7 +1009,7 @@
           <a:lstStyle xmlns:a="http://schemas.openxmlformats.org/drawingml/2006/main"/>
           <a:p xmlns:a="http://schemas.openxmlformats.org/drawingml/2006/main">
             <a:r>
-              <a:t>我们已经有A/B/C一套可实现方案，第一版只在一个明确争点和阶段贯通。研究核心放在用途级阻断与来源局部修复：同一事实可以对一种用途合格，对另一种用途待定。最接近的GraphRefine修事实，ClassMATe修定义，RHDA和ADVENT修程序；依赖传播本身也是已有思想。因此仅把它们组合不够，必须证明在法律含义、对象、状态和期限上有真实增量。最小对照用同样模型、原文与专家预算，比较忽略限定、整断言阻断和依赖级阻断修复，联合看错误使用、正确见证保留、未决率与审阅时间，避免全拒绝假装高精度。若局部范围不可靠就回退断言级；LLM编辑无净收益则保留真实片段和确定执行。延期微调、全成员EQ/MILP、大规模穷举、重叠记录编码、多世界和自动因素权重。原PDF的结果关联仍保留，有经核验的当事人/请求/阶段标签之后，训练内按纠纷家族比较单事实与增加关系组合的模型，在最终确认集不修正。今天可以向老师提出的是有机制依据、可检验的研究设计，不能宣称已经优于所有备选或已证明新颖。</a:t>
+              <a:t>Implement A/B/C for one issue/stage. Focus on purpose-level blocking and local source repair: a fact may qualify for one use and remain pending for another. GraphRefine repairs facts, ClassMATe definitions, RHDA/ADVENT programs, and dependency propagation is established. Combining them is insufficient; demonstrate incremental value for legal meaning, objects, status and deadlines. At matched model/source/expert budget compare ignoring qualifications, whole-assertion blocking and dependency-level blocking/repair on misuse, correct witnesses retained, pending rate and review time. Reject-all cannot win on precision. Fall back to assertion blocking if local scope is unreliable; retain real seeds/deterministic execution if LLM edits add no benefit. Defer fine-tuning, all-member EQ/MILP, broad enumeration, overlapping-record coding, possible worlds and automatic factor weights. Preserve outcome association after party/request/stage label validation: compare single facts versus added relations within dispute-group training splits, without final-confirmation repairs. Present an evidence-motivated, testable design, not superiority or established novelty.</a:t>
             </a:r>
           </a:p>
           <a:p xmlns:a="http://schemas.openxmlformats.org/drawingml/2006/main">
